--- a/SDV Hackathon 2025 - Pitching Slides Template.pptx
+++ b/SDV Hackathon 2025 - Pitching Slides Template.pptx
@@ -19351,7 +19351,7 @@
               <a:buChar char="-"/>
             </a:pPr>
             <a:r>
-              <a:rPr lang="pt-PT" sz="1800" i="1" dirty="0">
+              <a:rPr lang="pt-PT" sz="1800" i="1">
                 <a:solidFill>
                   <a:schemeClr val="dk1"/>
                 </a:solidFill>
@@ -19360,8 +19360,17 @@
                 <a:cs typeface="Roboto"/>
                 <a:sym typeface="Roboto"/>
               </a:rPr>
-              <a:t>Catarina Pereira</a:t>
+              <a:t>Catarina Ferreira</a:t>
             </a:r>
+            <a:endParaRPr lang="pt-PT" sz="1800" i="1" dirty="0">
+              <a:solidFill>
+                <a:schemeClr val="dk1"/>
+              </a:solidFill>
+              <a:latin typeface="Roboto"/>
+              <a:ea typeface="Roboto"/>
+              <a:cs typeface="Roboto"/>
+              <a:sym typeface="Roboto"/>
+            </a:endParaRPr>
           </a:p>
           <a:p>
             <a:pPr marL="298450" lvl="0" indent="-285750" algn="l" rtl="0">
@@ -19775,122 +19784,42 @@
           </a:bodyPr>
           <a:lstStyle/>
           <a:p>
-            <a:pPr marL="12700" lvl="0" indent="0" algn="l" rtl="0">
-              <a:spcBef>
-                <a:spcPts val="0"/>
-              </a:spcBef>
-              <a:spcAft>
-                <a:spcPts val="0"/>
-              </a:spcAft>
-              <a:buNone/>
-            </a:pPr>
+            <a:pPr lvl="0"/>
             <a:r>
-              <a:rPr lang="en" sz="1800" i="1">
-                <a:solidFill>
-                  <a:schemeClr val="dk1"/>
-                </a:solidFill>
-                <a:latin typeface="Roboto"/>
-                <a:ea typeface="Roboto"/>
-                <a:cs typeface="Roboto"/>
-                <a:sym typeface="Roboto"/>
+              <a:rPr lang="en-US" sz="1800" dirty="0">
+                <a:highlight>
+                  <a:schemeClr val="lt1"/>
+                </a:highlight>
               </a:rPr>
-              <a:t>Explain what the </a:t>
+              <a:t>Our product notifies users of road dangers like potholes in advance, providing real-time hazard alerts</a:t>
             </a:r>
-            <a:r>
-              <a:rPr lang="en" sz="1800" b="1" i="1">
-                <a:solidFill>
-                  <a:schemeClr val="dk1"/>
-                </a:solidFill>
-                <a:latin typeface="Roboto"/>
-                <a:ea typeface="Roboto"/>
-                <a:cs typeface="Roboto"/>
-                <a:sym typeface="Roboto"/>
-              </a:rPr>
-              <a:t>Added Value</a:t>
-            </a:r>
-            <a:r>
-              <a:rPr lang="en" sz="1800" i="1">
-                <a:solidFill>
-                  <a:schemeClr val="dk1"/>
-                </a:solidFill>
-                <a:latin typeface="Roboto"/>
-                <a:ea typeface="Roboto"/>
-                <a:cs typeface="Roboto"/>
-                <a:sym typeface="Roboto"/>
-              </a:rPr>
-              <a:t> of your solution / product / service is.</a:t>
-            </a:r>
-            <a:endParaRPr sz="1800" i="1">
-              <a:solidFill>
-                <a:schemeClr val="dk1"/>
-              </a:solidFill>
-              <a:latin typeface="Roboto"/>
-              <a:ea typeface="Roboto"/>
-              <a:cs typeface="Roboto"/>
-              <a:sym typeface="Roboto"/>
+          </a:p>
+          <a:p>
+            <a:pPr lvl="0"/>
+            <a:endParaRPr lang="en-US" sz="1800" dirty="0">
+              <a:highlight>
+                <a:schemeClr val="lt1"/>
+              </a:highlight>
             </a:endParaRPr>
           </a:p>
           <a:p>
-            <a:pPr marL="12700" lvl="0" indent="0" algn="l" rtl="0">
-              <a:spcBef>
-                <a:spcPts val="0"/>
-              </a:spcBef>
-              <a:spcAft>
-                <a:spcPts val="0"/>
-              </a:spcAft>
-              <a:buClr>
-                <a:schemeClr val="dk1"/>
-              </a:buClr>
-              <a:buFont typeface="Arial"/>
-              <a:buNone/>
-            </a:pPr>
-            <a:br>
-              <a:rPr lang="en" sz="1800" i="1">
-                <a:solidFill>
-                  <a:schemeClr val="dk1"/>
-                </a:solidFill>
-                <a:latin typeface="Roboto"/>
-                <a:ea typeface="Roboto"/>
-                <a:cs typeface="Roboto"/>
-                <a:sym typeface="Roboto"/>
-              </a:rPr>
-            </a:br>
+            <a:pPr lvl="0"/>
             <a:r>
-              <a:rPr lang="en" sz="1800" i="1">
-                <a:solidFill>
-                  <a:schemeClr val="dk1"/>
-                </a:solidFill>
-                <a:latin typeface="Roboto"/>
-                <a:ea typeface="Roboto"/>
-                <a:cs typeface="Roboto"/>
-                <a:sym typeface="Roboto"/>
-              </a:rPr>
-              <a:t>Explain why you think your solution is better than the other ones out there.</a:t>
+              <a:rPr lang="en-US" sz="1800" dirty="0"/>
+              <a:t>It also protects vehicles by helping drivers to avoid damage and discomfort caused by poor road conditions.</a:t>
             </a:r>
-            <a:endParaRPr sz="1800" i="1">
-              <a:solidFill>
-                <a:schemeClr val="dk1"/>
-              </a:solidFill>
-              <a:latin typeface="Roboto"/>
-              <a:ea typeface="Roboto"/>
-              <a:cs typeface="Roboto"/>
-              <a:sym typeface="Roboto"/>
-            </a:endParaRPr>
           </a:p>
           <a:p>
-            <a:pPr marL="0" marR="0" lvl="0" indent="0" algn="l" rtl="0">
-              <a:lnSpc>
-                <a:spcPct val="100000"/>
-              </a:lnSpc>
-              <a:spcBef>
-                <a:spcPts val="0"/>
-              </a:spcBef>
-              <a:spcAft>
-                <a:spcPts val="0"/>
-              </a:spcAft>
-              <a:buNone/>
-            </a:pPr>
-            <a:endParaRPr sz="1200" b="1">
+            <a:pPr lvl="0"/>
+            <a:endParaRPr lang="en-US" sz="1800" dirty="0"/>
+          </a:p>
+          <a:p>
+            <a:pPr lvl="0"/>
+            <a:r>
+              <a:rPr lang="en-US" sz="1800" dirty="0"/>
+              <a:t>And it enhances safety &amp; comfort, empowering users to make safer driving decisions on the go.</a:t>
+            </a:r>
+            <a:endParaRPr sz="1800" b="1" dirty="0">
               <a:solidFill>
                 <a:schemeClr val="dk1"/>
               </a:solidFill>
@@ -20041,134 +19970,23 @@
           </a:bodyPr>
           <a:lstStyle/>
           <a:p>
-            <a:pPr marL="12700" lvl="0" indent="0" algn="l" rtl="0">
-              <a:spcBef>
-                <a:spcPts val="0"/>
-              </a:spcBef>
-              <a:spcAft>
-                <a:spcPts val="0"/>
-              </a:spcAft>
-              <a:buNone/>
-            </a:pPr>
+            <a:pPr marL="12700" lvl="1"/>
             <a:r>
-              <a:rPr lang="en" sz="1800" i="1">
-                <a:solidFill>
-                  <a:schemeClr val="dk1"/>
-                </a:solidFill>
-                <a:latin typeface="Roboto"/>
-                <a:ea typeface="Roboto"/>
-                <a:cs typeface="Roboto"/>
-                <a:sym typeface="Roboto"/>
-              </a:rPr>
-              <a:t>Make a case on the </a:t>
+              <a:rPr lang="en-US" sz="1800" dirty="0"/>
+              <a:t>Our solution offers real-time road safety insights for everyday drivers and city authorities alike. </a:t>
             </a:r>
-            <a:r>
-              <a:rPr lang="en" sz="1800" b="1" i="1">
-                <a:solidFill>
-                  <a:schemeClr val="dk1"/>
-                </a:solidFill>
-                <a:latin typeface="Roboto"/>
-                <a:ea typeface="Roboto"/>
-                <a:cs typeface="Roboto"/>
-                <a:sym typeface="Roboto"/>
-              </a:rPr>
-              <a:t>Market Potential</a:t>
-            </a:r>
-            <a:r>
-              <a:rPr lang="en" sz="1800" i="1">
-                <a:solidFill>
-                  <a:schemeClr val="dk1"/>
-                </a:solidFill>
-                <a:latin typeface="Roboto"/>
-                <a:ea typeface="Roboto"/>
-                <a:cs typeface="Roboto"/>
-                <a:sym typeface="Roboto"/>
-              </a:rPr>
-              <a:t> for a product / service like yours</a:t>
-            </a:r>
-            <a:br>
-              <a:rPr lang="en" sz="1800" i="1">
-                <a:solidFill>
-                  <a:schemeClr val="dk1"/>
-                </a:solidFill>
-                <a:latin typeface="Roboto"/>
-                <a:ea typeface="Roboto"/>
-                <a:cs typeface="Roboto"/>
-                <a:sym typeface="Roboto"/>
-              </a:rPr>
-            </a:br>
-            <a:br>
-              <a:rPr lang="en" sz="1800" i="1">
-                <a:solidFill>
-                  <a:schemeClr val="dk1"/>
-                </a:solidFill>
-                <a:latin typeface="Roboto"/>
-                <a:ea typeface="Roboto"/>
-                <a:cs typeface="Roboto"/>
-                <a:sym typeface="Roboto"/>
-              </a:rPr>
-            </a:br>
-            <a:r>
-              <a:rPr lang="en" sz="1800" i="1">
-                <a:solidFill>
-                  <a:schemeClr val="dk1"/>
-                </a:solidFill>
-                <a:latin typeface="Roboto"/>
-                <a:ea typeface="Roboto"/>
-                <a:cs typeface="Roboto"/>
-                <a:sym typeface="Roboto"/>
-              </a:rPr>
-              <a:t>Enumerate your </a:t>
-            </a:r>
-            <a:r>
-              <a:rPr lang="en" sz="1800" b="1" i="1">
-                <a:solidFill>
-                  <a:schemeClr val="dk1"/>
-                </a:solidFill>
-                <a:latin typeface="Roboto"/>
-                <a:ea typeface="Roboto"/>
-                <a:cs typeface="Roboto"/>
-                <a:sym typeface="Roboto"/>
-              </a:rPr>
-              <a:t>Competitors</a:t>
-            </a:r>
-            <a:r>
-              <a:rPr lang="en" sz="1800" i="1">
-                <a:solidFill>
-                  <a:schemeClr val="dk1"/>
-                </a:solidFill>
-                <a:latin typeface="Roboto"/>
-                <a:ea typeface="Roboto"/>
-                <a:cs typeface="Roboto"/>
-                <a:sym typeface="Roboto"/>
-              </a:rPr>
-              <a:t> and explain how you differ from them.</a:t>
-            </a:r>
-            <a:endParaRPr sz="1800" i="1">
-              <a:solidFill>
-                <a:schemeClr val="dk1"/>
-              </a:solidFill>
-              <a:latin typeface="Roboto"/>
-              <a:ea typeface="Roboto"/>
-              <a:cs typeface="Roboto"/>
-              <a:sym typeface="Roboto"/>
-            </a:endParaRPr>
           </a:p>
           <a:p>
-            <a:pPr marL="12700" lvl="0" indent="0" algn="l" rtl="0">
-              <a:spcBef>
-                <a:spcPts val="0"/>
-              </a:spcBef>
-              <a:spcAft>
-                <a:spcPts val="0"/>
-              </a:spcAft>
-              <a:buClr>
-                <a:schemeClr val="dk1"/>
-              </a:buClr>
-              <a:buFont typeface="Arial"/>
-              <a:buNone/>
-            </a:pPr>
-            <a:endParaRPr sz="1800" i="1">
+            <a:pPr marL="12700" lvl="1"/>
+            <a:endParaRPr lang="en-US" sz="1800" dirty="0"/>
+          </a:p>
+          <a:p>
+            <a:pPr marL="12700" lvl="1"/>
+            <a:r>
+              <a:rPr lang="en-US" sz="1800" dirty="0"/>
+              <a:t>Unlike apps like Waze, which rely on manual user input, we leverage vehicle sensor data to automatically detect and classify road hazards — from potholes to dangerous surfaces — enabling safer commutes and smarter infrastructure management.</a:t>
+            </a:r>
+            <a:endParaRPr lang="en" sz="1800" dirty="0">
               <a:solidFill>
                 <a:schemeClr val="dk1"/>
               </a:solidFill>
@@ -20316,176 +20134,54 @@
           </a:bodyPr>
           <a:lstStyle/>
           <a:p>
-            <a:pPr marL="12700" lvl="0" indent="0" algn="l" rtl="0">
-              <a:spcBef>
-                <a:spcPts val="0"/>
-              </a:spcBef>
-              <a:spcAft>
-                <a:spcPts val="0"/>
-              </a:spcAft>
-              <a:buNone/>
+            <a:pPr marL="12700" lvl="0">
+              <a:buClr>
+                <a:schemeClr val="dk1"/>
+              </a:buClr>
             </a:pPr>
             <a:r>
-              <a:rPr lang="en" sz="1800" i="1">
-                <a:solidFill>
-                  <a:schemeClr val="dk1"/>
-                </a:solidFill>
-                <a:latin typeface="Roboto"/>
-                <a:ea typeface="Roboto"/>
-                <a:cs typeface="Roboto"/>
-                <a:sym typeface="Roboto"/>
-              </a:rPr>
-              <a:t>Explain how you envision generating sales for your product or service.</a:t>
+              <a:rPr lang="en-US" sz="1800" dirty="0"/>
+              <a:t>Business model focuses on selling road condition data to government agencies and GPS platforms (e.g., Waze, Google Maps), enabling them to offer more accurate routing and road safety information to users.</a:t>
             </a:r>
-            <a:endParaRPr sz="1800" i="1">
-              <a:solidFill>
-                <a:schemeClr val="dk1"/>
-              </a:solidFill>
-              <a:latin typeface="Roboto"/>
-              <a:ea typeface="Roboto"/>
-              <a:cs typeface="Roboto"/>
-              <a:sym typeface="Roboto"/>
-            </a:endParaRPr>
           </a:p>
           <a:p>
-            <a:pPr marL="12700" lvl="0" indent="0" algn="l" rtl="0">
-              <a:spcBef>
-                <a:spcPts val="0"/>
-              </a:spcBef>
-              <a:spcAft>
-                <a:spcPts val="0"/>
-              </a:spcAft>
-              <a:buNone/>
+            <a:pPr marL="12700" lvl="0">
+              <a:buClr>
+                <a:schemeClr val="dk1"/>
+              </a:buClr>
             </a:pPr>
-            <a:endParaRPr sz="1800" i="1">
-              <a:solidFill>
-                <a:schemeClr val="dk1"/>
-              </a:solidFill>
-              <a:latin typeface="Roboto"/>
-              <a:ea typeface="Roboto"/>
-              <a:cs typeface="Roboto"/>
-              <a:sym typeface="Roboto"/>
-            </a:endParaRPr>
+            <a:endParaRPr lang="en-US" sz="1800" dirty="0"/>
           </a:p>
           <a:p>
-            <a:pPr marL="12700" lvl="0" indent="0" algn="l" rtl="0">
-              <a:spcBef>
-                <a:spcPts val="0"/>
-              </a:spcBef>
-              <a:spcAft>
-                <a:spcPts val="0"/>
-              </a:spcAft>
-              <a:buNone/>
+            <a:pPr marL="12700" lvl="0">
+              <a:buClr>
+                <a:schemeClr val="dk1"/>
+              </a:buClr>
             </a:pPr>
             <a:r>
-              <a:rPr lang="en" sz="1800" i="1">
-                <a:solidFill>
-                  <a:schemeClr val="dk1"/>
-                </a:solidFill>
-                <a:latin typeface="Roboto"/>
-                <a:ea typeface="Roboto"/>
-                <a:cs typeface="Roboto"/>
-                <a:sym typeface="Roboto"/>
-              </a:rPr>
-              <a:t>Describe the way you envision implementing the business model.</a:t>
+              <a:rPr lang="en-US" sz="1800" dirty="0"/>
+              <a:t>Plans to integrate with automotive manufacturers, either directly or via over-the-air (OTA) updates to use existing sensors</a:t>
             </a:r>
-            <a:endParaRPr sz="1800" i="1">
-              <a:solidFill>
-                <a:schemeClr val="dk1"/>
-              </a:solidFill>
-              <a:latin typeface="Roboto"/>
-              <a:ea typeface="Roboto"/>
-              <a:cs typeface="Roboto"/>
-              <a:sym typeface="Roboto"/>
-            </a:endParaRPr>
           </a:p>
           <a:p>
-            <a:pPr marL="12700" lvl="0" indent="0" algn="l" rtl="0">
-              <a:spcBef>
-                <a:spcPts val="0"/>
-              </a:spcBef>
-              <a:spcAft>
-                <a:spcPts val="0"/>
-              </a:spcAft>
-              <a:buNone/>
+            <a:pPr marL="12700" lvl="0">
+              <a:buClr>
+                <a:schemeClr val="dk1"/>
+              </a:buClr>
             </a:pPr>
-            <a:endParaRPr sz="1800" i="1">
-              <a:solidFill>
-                <a:schemeClr val="dk1"/>
-              </a:solidFill>
-              <a:latin typeface="Roboto"/>
-              <a:ea typeface="Roboto"/>
-              <a:cs typeface="Roboto"/>
-              <a:sym typeface="Roboto"/>
-            </a:endParaRPr>
+            <a:endParaRPr lang="en-US" sz="1800" dirty="0"/>
           </a:p>
           <a:p>
-            <a:pPr marL="12700" lvl="0" indent="0" algn="l" rtl="0">
-              <a:spcBef>
-                <a:spcPts val="0"/>
-              </a:spcBef>
-              <a:spcAft>
-                <a:spcPts val="0"/>
-              </a:spcAft>
-              <a:buNone/>
+            <a:pPr marL="12700" lvl="0">
+              <a:buClr>
+                <a:schemeClr val="dk1"/>
+              </a:buClr>
             </a:pPr>
             <a:r>
-              <a:rPr lang="en" sz="1800" i="1">
-                <a:solidFill>
-                  <a:schemeClr val="dk1"/>
-                </a:solidFill>
-                <a:latin typeface="Roboto"/>
-                <a:ea typeface="Roboto"/>
-                <a:cs typeface="Roboto"/>
-                <a:sym typeface="Roboto"/>
-              </a:rPr>
-              <a:t>Enumerate what the required funds would be and explain what they’d be used for.</a:t>
+              <a:rPr lang="en-US" sz="1800" dirty="0"/>
+              <a:t>Funding will support integration with real vehicle data, enhancing pothole detection and severity classification. It will also cover scalable, cloud-based infrastructure to support data processing and delivery</a:t>
             </a:r>
-            <a:endParaRPr sz="1800" i="1">
-              <a:solidFill>
-                <a:schemeClr val="dk1"/>
-              </a:solidFill>
-              <a:latin typeface="Roboto"/>
-              <a:ea typeface="Roboto"/>
-              <a:cs typeface="Roboto"/>
-              <a:sym typeface="Roboto"/>
-            </a:endParaRPr>
-          </a:p>
-          <a:p>
-            <a:pPr marL="12700" lvl="0" indent="0" algn="l" rtl="0">
-              <a:spcBef>
-                <a:spcPts val="0"/>
-              </a:spcBef>
-              <a:spcAft>
-                <a:spcPts val="0"/>
-              </a:spcAft>
-              <a:buNone/>
-            </a:pPr>
-            <a:endParaRPr sz="1800" i="1">
-              <a:solidFill>
-                <a:schemeClr val="dk1"/>
-              </a:solidFill>
-              <a:latin typeface="Roboto"/>
-              <a:ea typeface="Roboto"/>
-              <a:cs typeface="Roboto"/>
-              <a:sym typeface="Roboto"/>
-            </a:endParaRPr>
-          </a:p>
-          <a:p>
-            <a:pPr marL="12700" lvl="0" indent="0" algn="l" rtl="0">
-              <a:spcBef>
-                <a:spcPts val="0"/>
-              </a:spcBef>
-              <a:spcAft>
-                <a:spcPts val="0"/>
-              </a:spcAft>
-              <a:buClr>
-                <a:schemeClr val="dk1"/>
-              </a:buClr>
-              <a:buFont typeface="Arial"/>
-              <a:buNone/>
-            </a:pPr>
-            <a:endParaRPr sz="1800" i="1">
+            <a:endParaRPr sz="1800" dirty="0">
               <a:solidFill>
                 <a:schemeClr val="dk1"/>
               </a:solidFill>
@@ -20508,7 +20204,7 @@
               </a:spcAft>
               <a:buNone/>
             </a:pPr>
-            <a:endParaRPr sz="1200" b="1">
+            <a:endParaRPr sz="1200" b="1" dirty="0">
               <a:solidFill>
                 <a:schemeClr val="dk1"/>
               </a:solidFill>
@@ -20659,21 +20355,15 @@
           </a:bodyPr>
           <a:lstStyle/>
           <a:p>
-            <a:pPr marL="12700" lvl="0" indent="0" algn="l" rtl="0">
-              <a:spcBef>
-                <a:spcPts val="0"/>
-              </a:spcBef>
-              <a:spcAft>
-                <a:spcPts val="0"/>
-              </a:spcAft>
+            <a:pPr marL="298450" lvl="0" indent="-285750">
               <a:buClr>
                 <a:schemeClr val="dk1"/>
               </a:buClr>
-              <a:buFont typeface="Arial"/>
-              <a:buNone/>
+              <a:buFontTx/>
+              <a:buChar char="-"/>
             </a:pPr>
             <a:r>
-              <a:rPr lang="en" sz="1800" i="1">
+              <a:rPr lang="pt-PT" sz="1800" i="1" dirty="0">
                 <a:solidFill>
                   <a:schemeClr val="dk1"/>
                 </a:solidFill>
@@ -20682,9 +20372,21 @@
                 <a:cs typeface="Roboto"/>
                 <a:sym typeface="Roboto"/>
               </a:rPr>
-              <a:t>List the contact details of the people in charge of the different aspects of the “business”.</a:t>
+              <a:t>Rodrigo Oliveira – Chairman - </a:t>
             </a:r>
-            <a:endParaRPr sz="1800" i="1">
+            <a:r>
+              <a:rPr lang="pt-PT" sz="1800" i="1" dirty="0" err="1">
+                <a:solidFill>
+                  <a:schemeClr val="dk1"/>
+                </a:solidFill>
+                <a:latin typeface="Roboto"/>
+                <a:ea typeface="Roboto"/>
+                <a:cs typeface="Roboto"/>
+                <a:sym typeface="Roboto"/>
+              </a:rPr>
+              <a:t>rodrigo.oliveira@engineeringhub.man</a:t>
+            </a:r>
+            <a:endParaRPr lang="pt-PT" sz="1800" i="1" dirty="0">
               <a:solidFill>
                 <a:schemeClr val="dk1"/>
               </a:solidFill>
@@ -20695,25 +20397,282 @@
             </a:endParaRPr>
           </a:p>
           <a:p>
-            <a:pPr marL="0" marR="0" lvl="0" indent="0" algn="l" rtl="0">
-              <a:lnSpc>
-                <a:spcPct val="100000"/>
-              </a:lnSpc>
-              <a:spcBef>
-                <a:spcPts val="0"/>
-              </a:spcBef>
-              <a:spcAft>
-                <a:spcPts val="0"/>
-              </a:spcAft>
-              <a:buNone/>
+            <a:pPr marL="298450" indent="-285750">
+              <a:buClr>
+                <a:schemeClr val="dk1"/>
+              </a:buClr>
+              <a:buFontTx/>
+              <a:buChar char="-"/>
             </a:pPr>
-            <a:endParaRPr sz="1200" b="1">
+            <a:r>
+              <a:rPr lang="pt-PT" sz="1800" i="1" dirty="0">
+                <a:solidFill>
+                  <a:schemeClr val="dk1"/>
+                </a:solidFill>
+                <a:latin typeface="Roboto"/>
+                <a:ea typeface="Roboto"/>
+                <a:cs typeface="Roboto"/>
+                <a:sym typeface="Roboto"/>
+              </a:rPr>
+              <a:t>Catarina Ferreira – UI/UX Designer -</a:t>
+            </a:r>
+            <a:r>
+              <a:rPr lang="en-US" sz="1800" i="1" dirty="0" err="1">
+                <a:solidFill>
+                  <a:schemeClr val="dk1"/>
+                </a:solidFill>
+                <a:latin typeface="Roboto"/>
+                <a:ea typeface="Roboto"/>
+                <a:cs typeface="Roboto"/>
+              </a:rPr>
+              <a:t>catarina.ferreira@engineeringhub.man</a:t>
+            </a:r>
+            <a:endParaRPr lang="pt-PT" sz="1800" i="1" dirty="0">
               <a:solidFill>
                 <a:schemeClr val="dk1"/>
               </a:solidFill>
-              <a:highlight>
-                <a:schemeClr val="lt1"/>
-              </a:highlight>
+              <a:latin typeface="Roboto"/>
+              <a:ea typeface="Roboto"/>
+              <a:cs typeface="Roboto"/>
+              <a:sym typeface="Roboto"/>
+            </a:endParaRPr>
+          </a:p>
+          <a:p>
+            <a:pPr marL="298450" lvl="0" indent="-285750">
+              <a:buClr>
+                <a:schemeClr val="dk1"/>
+              </a:buClr>
+              <a:buFontTx/>
+              <a:buChar char="-"/>
+            </a:pPr>
+            <a:r>
+              <a:rPr lang="pt-PT" sz="1800" i="1" dirty="0">
+                <a:solidFill>
+                  <a:schemeClr val="dk1"/>
+                </a:solidFill>
+                <a:latin typeface="Roboto"/>
+                <a:ea typeface="Roboto"/>
+                <a:cs typeface="Roboto"/>
+                <a:sym typeface="Roboto"/>
+              </a:rPr>
+              <a:t>Guilherme Barros – </a:t>
+            </a:r>
+            <a:r>
+              <a:rPr lang="pt-PT" sz="1800" i="1" dirty="0" err="1">
+                <a:solidFill>
+                  <a:schemeClr val="dk1"/>
+                </a:solidFill>
+                <a:latin typeface="Roboto"/>
+                <a:ea typeface="Roboto"/>
+                <a:cs typeface="Roboto"/>
+                <a:sym typeface="Roboto"/>
+              </a:rPr>
+              <a:t>Finance</a:t>
+            </a:r>
+            <a:r>
+              <a:rPr lang="pt-PT" sz="1800" i="1" dirty="0">
+                <a:solidFill>
+                  <a:schemeClr val="dk1"/>
+                </a:solidFill>
+                <a:latin typeface="Roboto"/>
+                <a:ea typeface="Roboto"/>
+                <a:cs typeface="Roboto"/>
+                <a:sym typeface="Roboto"/>
+              </a:rPr>
+              <a:t> </a:t>
+            </a:r>
+            <a:r>
+              <a:rPr lang="pt-PT" sz="1800" i="1" dirty="0" err="1">
+                <a:solidFill>
+                  <a:schemeClr val="dk1"/>
+                </a:solidFill>
+                <a:latin typeface="Roboto"/>
+                <a:ea typeface="Roboto"/>
+                <a:cs typeface="Roboto"/>
+                <a:sym typeface="Roboto"/>
+              </a:rPr>
+              <a:t>and</a:t>
+            </a:r>
+            <a:r>
+              <a:rPr lang="pt-PT" sz="1800" i="1" dirty="0">
+                <a:solidFill>
+                  <a:schemeClr val="dk1"/>
+                </a:solidFill>
+                <a:latin typeface="Roboto"/>
+                <a:ea typeface="Roboto"/>
+                <a:cs typeface="Roboto"/>
+                <a:sym typeface="Roboto"/>
+              </a:rPr>
+              <a:t> </a:t>
+            </a:r>
+            <a:r>
+              <a:rPr lang="pt-PT" sz="1800" i="1" dirty="0" err="1">
+                <a:solidFill>
+                  <a:schemeClr val="dk1"/>
+                </a:solidFill>
+                <a:latin typeface="Roboto"/>
+                <a:ea typeface="Roboto"/>
+                <a:cs typeface="Roboto"/>
+                <a:sym typeface="Roboto"/>
+              </a:rPr>
+              <a:t>contracts</a:t>
+            </a:r>
+            <a:r>
+              <a:rPr lang="pt-PT" sz="1800" i="1" dirty="0">
+                <a:solidFill>
+                  <a:schemeClr val="dk1"/>
+                </a:solidFill>
+                <a:latin typeface="Roboto"/>
+                <a:ea typeface="Roboto"/>
+                <a:cs typeface="Roboto"/>
+                <a:sym typeface="Roboto"/>
+              </a:rPr>
+              <a:t> – </a:t>
+            </a:r>
+            <a:r>
+              <a:rPr lang="pt-PT" sz="1800" i="1" dirty="0" err="1">
+                <a:solidFill>
+                  <a:schemeClr val="dk1"/>
+                </a:solidFill>
+                <a:latin typeface="Roboto"/>
+                <a:ea typeface="Roboto"/>
+                <a:cs typeface="Roboto"/>
+                <a:sym typeface="Roboto"/>
+              </a:rPr>
+              <a:t>guilherme.barros@engineeringhub.man</a:t>
+            </a:r>
+            <a:endParaRPr lang="pt-PT" sz="1800" i="1" dirty="0">
+              <a:solidFill>
+                <a:schemeClr val="dk1"/>
+              </a:solidFill>
+              <a:latin typeface="Roboto"/>
+              <a:ea typeface="Roboto"/>
+              <a:cs typeface="Roboto"/>
+              <a:sym typeface="Roboto"/>
+            </a:endParaRPr>
+          </a:p>
+          <a:p>
+            <a:pPr marL="298450" indent="-285750">
+              <a:buClr>
+                <a:schemeClr val="dk1"/>
+              </a:buClr>
+              <a:buFontTx/>
+              <a:buChar char="-"/>
+            </a:pPr>
+            <a:r>
+              <a:rPr lang="pt-PT" sz="1800" i="1" dirty="0">
+                <a:solidFill>
+                  <a:schemeClr val="dk1"/>
+                </a:solidFill>
+                <a:latin typeface="Roboto"/>
+                <a:ea typeface="Roboto"/>
+                <a:cs typeface="Roboto"/>
+                <a:sym typeface="Roboto"/>
+              </a:rPr>
+              <a:t>Bruno de Sousa – </a:t>
+            </a:r>
+            <a:r>
+              <a:rPr lang="pt-PT" sz="1800" i="1" dirty="0" err="1">
+                <a:solidFill>
+                  <a:schemeClr val="dk1"/>
+                </a:solidFill>
+                <a:latin typeface="Roboto"/>
+                <a:ea typeface="Roboto"/>
+                <a:cs typeface="Roboto"/>
+                <a:sym typeface="Roboto"/>
+              </a:rPr>
+              <a:t>Cloud</a:t>
+            </a:r>
+            <a:r>
+              <a:rPr lang="pt-PT" sz="1800" i="1" dirty="0">
+                <a:solidFill>
+                  <a:schemeClr val="dk1"/>
+                </a:solidFill>
+                <a:latin typeface="Roboto"/>
+                <a:ea typeface="Roboto"/>
+                <a:cs typeface="Roboto"/>
+                <a:sym typeface="Roboto"/>
+              </a:rPr>
+              <a:t> </a:t>
+            </a:r>
+            <a:r>
+              <a:rPr lang="pt-PT" sz="1800" i="1" dirty="0" err="1">
+                <a:solidFill>
+                  <a:schemeClr val="dk1"/>
+                </a:solidFill>
+                <a:latin typeface="Roboto"/>
+                <a:ea typeface="Roboto"/>
+                <a:cs typeface="Roboto"/>
+                <a:sym typeface="Roboto"/>
+              </a:rPr>
+              <a:t>Archictect</a:t>
+            </a:r>
+            <a:r>
+              <a:rPr lang="pt-PT" sz="1800" i="1" dirty="0">
+                <a:solidFill>
+                  <a:schemeClr val="dk1"/>
+                </a:solidFill>
+                <a:latin typeface="Roboto"/>
+                <a:ea typeface="Roboto"/>
+                <a:cs typeface="Roboto"/>
+                <a:sym typeface="Roboto"/>
+              </a:rPr>
+              <a:t> - </a:t>
+            </a:r>
+            <a:r>
+              <a:rPr lang="en-US" sz="1800" i="1" dirty="0" err="1">
+                <a:solidFill>
+                  <a:schemeClr val="dk1"/>
+                </a:solidFill>
+                <a:latin typeface="Roboto"/>
+                <a:ea typeface="Roboto"/>
+                <a:cs typeface="Roboto"/>
+              </a:rPr>
+              <a:t>bruno.sousa@engineeringhub.man</a:t>
+            </a:r>
+            <a:endParaRPr lang="en-US" sz="1800" i="1" dirty="0">
+              <a:solidFill>
+                <a:schemeClr val="dk1"/>
+              </a:solidFill>
+              <a:latin typeface="Roboto"/>
+              <a:ea typeface="Roboto"/>
+              <a:cs typeface="Roboto"/>
+            </a:endParaRPr>
+          </a:p>
+          <a:p>
+            <a:pPr marL="12700" lvl="0">
+              <a:buClr>
+                <a:schemeClr val="dk1"/>
+              </a:buClr>
+            </a:pPr>
+            <a:endParaRPr lang="pt-PT" sz="1800" i="1" dirty="0">
+              <a:solidFill>
+                <a:schemeClr val="dk1"/>
+              </a:solidFill>
+              <a:latin typeface="Roboto"/>
+              <a:ea typeface="Roboto"/>
+              <a:cs typeface="Roboto"/>
+              <a:sym typeface="Roboto"/>
+            </a:endParaRPr>
+          </a:p>
+          <a:p>
+            <a:pPr marL="12700" lvl="0" indent="0" algn="l" rtl="0">
+              <a:spcBef>
+                <a:spcPts val="0"/>
+              </a:spcBef>
+              <a:spcAft>
+                <a:spcPts val="0"/>
+              </a:spcAft>
+              <a:buClr>
+                <a:schemeClr val="dk1"/>
+              </a:buClr>
+              <a:buFont typeface="Arial"/>
+              <a:buNone/>
+            </a:pPr>
+            <a:endParaRPr lang="en" sz="1800" dirty="0">
+              <a:solidFill>
+                <a:schemeClr val="dk1"/>
+              </a:solidFill>
               <a:latin typeface="Roboto"/>
               <a:ea typeface="Roboto"/>
               <a:cs typeface="Roboto"/>
